--- a/docs/pptx/Ch13_SUPPLEMENT.pptx
+++ b/docs/pptx/Ch13_SUPPLEMENT.pptx
@@ -503,10 +503,18 @@
           <a:lstStyle/>
           <a:p>
             <a:r>
-              <a:rPr lang="en-US" dirty="0"/>
-              <a:t/>
-            </a:r>
-            <a:endParaRPr lang="en-US" dirty="0"/>
+              <a:t>PROF: Exercice benchmark — mesurer ArrayList.get() vs LinkedList.get() pour n = 1000, 10000, 100000.</a:t>
+            </a:r>
+          </a:p>
+          <a:p>
+            <a:r>
+              <a:t>Comparer les résultats avec la prédiction Big O.</a:t>
+            </a:r>
+          </a:p>
+          <a:p>
+            <a:r>
+              <a:t>Durée : 30 min coding + 15 min analyse.</a:t>
+            </a:r>
           </a:p>
         </p:txBody>
       </p:sp>
@@ -591,10 +599,18 @@
           <a:lstStyle/>
           <a:p>
             <a:r>
-              <a:rPr lang="en-US" dirty="0"/>
-              <a:t/>
-            </a:r>
-            <a:endParaRPr lang="en-US" dirty="0"/>
+              <a:t>PROF: Questions sur les facteurs de performance.</a:t>
+            </a:r>
+          </a:p>
+          <a:p>
+            <a:r>
+              <a:t>'Pourquoi un benchmark donne des résultats différents à chaque exécution ?'</a:t>
+            </a:r>
+          </a:p>
+          <a:p>
+            <a:r>
+              <a:t>→ GC, JIT, cache CPU, autres processus.</a:t>
+            </a:r>
           </a:p>
         </p:txBody>
       </p:sp>
@@ -679,10 +695,13 @@
           <a:lstStyle/>
           <a:p>
             <a:r>
-              <a:rPr lang="en-US" dirty="0"/>
-              <a:t/>
-            </a:r>
-            <a:endParaRPr lang="en-US" dirty="0"/>
+              <a:t>PROF: Récap — Big O = tendance théorique, Benchmark = mesure pratique.</a:t>
+            </a:r>
+          </a:p>
+          <a:p>
+            <a:r>
+              <a:t>Les deux sont complémentaires. Big O pour comparer des familles, benchmark pour les cas concrets.</a:t>
+            </a:r>
           </a:p>
         </p:txBody>
       </p:sp>
